--- a/For System administrators/8. SSH/Настройка ssh-сервера.pptx
+++ b/For System administrators/8. SSH/Настройка ssh-сервера.pptx
@@ -295,7 +295,7 @@
           <a:p>
             <a:fld id="{B4C71EC6-210F-42DE-9C53-41977AD35B3D}" type="datetimeFigureOut">
               <a:rPr lang="ru-RU" smtClean="0"/>
-              <a:t>01.09.2024</a:t>
+              <a:t>17.10.2026</a:t>
             </a:fld>
             <a:endParaRPr lang="ru-RU"/>
           </a:p>
@@ -460,7 +460,7 @@
           <a:p>
             <a:fld id="{B4C71EC6-210F-42DE-9C53-41977AD35B3D}" type="datetimeFigureOut">
               <a:rPr lang="ru-RU" smtClean="0"/>
-              <a:t>01.09.2024</a:t>
+              <a:t>17.10.2026</a:t>
             </a:fld>
             <a:endParaRPr lang="ru-RU"/>
           </a:p>
@@ -635,7 +635,7 @@
           <a:p>
             <a:fld id="{B4C71EC6-210F-42DE-9C53-41977AD35B3D}" type="datetimeFigureOut">
               <a:rPr lang="ru-RU" smtClean="0"/>
-              <a:t>01.09.2024</a:t>
+              <a:t>17.10.2026</a:t>
             </a:fld>
             <a:endParaRPr lang="ru-RU"/>
           </a:p>
@@ -800,7 +800,7 @@
           <a:p>
             <a:fld id="{B4C71EC6-210F-42DE-9C53-41977AD35B3D}" type="datetimeFigureOut">
               <a:rPr lang="ru-RU" smtClean="0"/>
-              <a:t>01.09.2024</a:t>
+              <a:t>17.10.2026</a:t>
             </a:fld>
             <a:endParaRPr lang="ru-RU"/>
           </a:p>
@@ -1041,7 +1041,7 @@
           <a:p>
             <a:fld id="{B4C71EC6-210F-42DE-9C53-41977AD35B3D}" type="datetimeFigureOut">
               <a:rPr lang="ru-RU" smtClean="0"/>
-              <a:t>01.09.2024</a:t>
+              <a:t>17.10.2026</a:t>
             </a:fld>
             <a:endParaRPr lang="ru-RU"/>
           </a:p>
@@ -1324,7 +1324,7 @@
           <a:p>
             <a:fld id="{B4C71EC6-210F-42DE-9C53-41977AD35B3D}" type="datetimeFigureOut">
               <a:rPr lang="ru-RU" smtClean="0"/>
-              <a:t>01.09.2024</a:t>
+              <a:t>17.10.2026</a:t>
             </a:fld>
             <a:endParaRPr lang="ru-RU"/>
           </a:p>
@@ -1741,7 +1741,7 @@
           <a:p>
             <a:fld id="{B4C71EC6-210F-42DE-9C53-41977AD35B3D}" type="datetimeFigureOut">
               <a:rPr lang="ru-RU" smtClean="0"/>
-              <a:t>01.09.2024</a:t>
+              <a:t>17.10.2026</a:t>
             </a:fld>
             <a:endParaRPr lang="ru-RU"/>
           </a:p>
@@ -1854,7 +1854,7 @@
           <a:p>
             <a:fld id="{B4C71EC6-210F-42DE-9C53-41977AD35B3D}" type="datetimeFigureOut">
               <a:rPr lang="ru-RU" smtClean="0"/>
-              <a:t>01.09.2024</a:t>
+              <a:t>17.10.2026</a:t>
             </a:fld>
             <a:endParaRPr lang="ru-RU"/>
           </a:p>
@@ -1944,7 +1944,7 @@
           <a:p>
             <a:fld id="{B4C71EC6-210F-42DE-9C53-41977AD35B3D}" type="datetimeFigureOut">
               <a:rPr lang="ru-RU" smtClean="0"/>
-              <a:t>01.09.2024</a:t>
+              <a:t>17.10.2026</a:t>
             </a:fld>
             <a:endParaRPr lang="ru-RU"/>
           </a:p>
@@ -2216,7 +2216,7 @@
           <a:p>
             <a:fld id="{B4C71EC6-210F-42DE-9C53-41977AD35B3D}" type="datetimeFigureOut">
               <a:rPr lang="ru-RU" smtClean="0"/>
-              <a:t>01.09.2024</a:t>
+              <a:t>17.10.2026</a:t>
             </a:fld>
             <a:endParaRPr lang="ru-RU"/>
           </a:p>
@@ -2464,7 +2464,7 @@
           <a:p>
             <a:fld id="{B4C71EC6-210F-42DE-9C53-41977AD35B3D}" type="datetimeFigureOut">
               <a:rPr lang="ru-RU" smtClean="0"/>
-              <a:t>01.09.2024</a:t>
+              <a:t>17.10.2026</a:t>
             </a:fld>
             <a:endParaRPr lang="ru-RU"/>
           </a:p>
@@ -2672,7 +2672,7 @@
           <a:p>
             <a:fld id="{B4C71EC6-210F-42DE-9C53-41977AD35B3D}" type="datetimeFigureOut">
               <a:rPr lang="ru-RU" smtClean="0"/>
-              <a:t>01.09.2024</a:t>
+              <a:t>17.10.2026</a:t>
             </a:fld>
             <a:endParaRPr lang="ru-RU"/>
           </a:p>
@@ -3306,16 +3306,16 @@
               <a:t>. </a:t>
             </a:r>
             <a:r>
+              <a:rPr lang="ru-RU" smtClean="0"/>
+              <a:t>В </a:t>
+            </a:r>
+            <a:r>
+              <a:rPr lang="ru-RU" smtClean="0"/>
+              <a:t>версиях </a:t>
+            </a:r>
+            <a:r>
               <a:rPr lang="ru-RU" dirty="0" smtClean="0"/>
-              <a:t>В </a:t>
-            </a:r>
-            <a:r>
-              <a:rPr lang="ru-RU" dirty="0" err="1" smtClean="0"/>
-              <a:t>верчиях</a:t>
-            </a:r>
-            <a:r>
-              <a:rPr lang="ru-RU" dirty="0" smtClean="0"/>
-              <a:t> раньше сказать не могу не помню. А с 6 я вообще работал с предустановленной. </a:t>
+              <a:t>раньше сказать не могу не помню. А с 6 я вообще работал с предустановленной. </a:t>
             </a:r>
             <a:endParaRPr lang="ru-RU" dirty="0"/>
           </a:p>
